--- a/docs/slides/Modulo 3/preview01_walmart.pptx
+++ b/docs/slides/Modulo 3/preview01_walmart.pptx
@@ -14,6 +14,8 @@
     <p:sldId id="262" r:id="rId8"/>
     <p:sldId id="263" r:id="rId9"/>
     <p:sldId id="264" r:id="rId10"/>
+    <p:sldId id="265" r:id="rId15"/>
+    <p:sldId id="266" r:id="rId16"/>
   </p:sldIdLst>
   <p:sldSz cx="12188825" cy="6858000"/>
   <p:notesSz cx="6858000" cy="9144000"/>
@@ -3288,6 +3290,888 @@
             </a:pPr>
             <a:r>
               <a:t>Dia 1 - Que funciona, que no funciona y por que</a:t>
+            </a:r>
+          </a:p>
+        </p:txBody>
+      </p:sp>
+    </p:spTree>
+  </p:cSld>
+  <p:clrMapOvr>
+    <a:masterClrMapping/>
+  </p:clrMapOvr>
+</p:sld>
+</file>
+
+<file path=ppt/slides/slide10.xml><?xml version="1.0" encoding="utf-8"?>
+<p:sld xmlns:a="http://schemas.openxmlformats.org/drawingml/2006/main" xmlns:p="http://schemas.openxmlformats.org/presentationml/2006/main" xmlns:r="http://schemas.openxmlformats.org/officeDocument/2006/relationships">
+  <p:cSld>
+    <p:spTree>
+      <p:nvGrpSpPr>
+        <p:cNvPr id="1" name=""/>
+        <p:cNvGrpSpPr/>
+        <p:nvPr/>
+      </p:nvGrpSpPr>
+      <p:grpSpPr/>
+      <p:sp>
+        <p:nvSpPr>
+          <p:cNvPr id="2" name="Rectangle 1"/>
+          <p:cNvSpPr/>
+          <p:nvPr/>
+        </p:nvSpPr>
+        <p:spPr>
+          <a:xfrm>
+            <a:off x="0" y="0"/>
+            <a:ext cx="12188952" cy="73152"/>
+          </a:xfrm>
+          <a:prstGeom prst="rect">
+            <a:avLst/>
+          </a:prstGeom>
+          <a:solidFill>
+            <a:srgbClr val="22627E"/>
+          </a:solidFill>
+          <a:ln>
+            <a:noFill/>
+          </a:ln>
+        </p:spPr>
+        <p:style>
+          <a:lnRef idx="1">
+            <a:schemeClr val="accent1"/>
+          </a:lnRef>
+          <a:fillRef idx="3">
+            <a:schemeClr val="accent1"/>
+          </a:fillRef>
+          <a:effectRef idx="2">
+            <a:schemeClr val="accent1"/>
+          </a:effectRef>
+          <a:fontRef idx="minor">
+            <a:schemeClr val="lt1"/>
+          </a:fontRef>
+        </p:style>
+        <p:txBody>
+          <a:bodyPr rtlCol="0" anchor="ctr"/>
+          <a:lstStyle/>
+          <a:p>
+            <a:pPr algn="ctr"/>
+          </a:p>
+        </p:txBody>
+      </p:sp>
+      <p:sp>
+        <p:nvSpPr>
+          <p:cNvPr id="3" name="TextBox 2"/>
+          <p:cNvSpPr txBox="1"/>
+          <p:nvPr/>
+        </p:nvSpPr>
+        <p:spPr>
+          <a:xfrm>
+            <a:off x="457200" y="274320"/>
+            <a:ext cx="10972800" cy="731520"/>
+          </a:xfrm>
+          <a:prstGeom prst="rect">
+            <a:avLst/>
+          </a:prstGeom>
+          <a:noFill/>
+        </p:spPr>
+        <p:txBody>
+          <a:bodyPr wrap="square"/>
+          <a:lstStyle/>
+          <a:p>
+            <a:pPr algn="l">
+              <a:defRPr sz="3200" b="1">
+                <a:solidFill>
+                  <a:srgbClr val="22627E"/>
+                </a:solidFill>
+                <a:latin typeface="Calibri"/>
+              </a:defRPr>
+            </a:pPr>
+            <a:r>
+              <a:t>Respuestas a las preguntas clave</a:t>
+            </a:r>
+          </a:p>
+        </p:txBody>
+      </p:sp>
+      <p:sp>
+        <p:nvSpPr>
+          <p:cNvPr id="4" name="Rectangle 3"/>
+          <p:cNvSpPr/>
+          <p:nvPr/>
+        </p:nvSpPr>
+        <p:spPr>
+          <a:xfrm>
+            <a:off x="457200" y="1051560"/>
+            <a:ext cx="10972800" cy="27432"/>
+          </a:xfrm>
+          <a:prstGeom prst="rect">
+            <a:avLst/>
+          </a:prstGeom>
+          <a:solidFill>
+            <a:srgbClr val="22627E"/>
+          </a:solidFill>
+          <a:ln>
+            <a:noFill/>
+          </a:ln>
+        </p:spPr>
+        <p:style>
+          <a:lnRef idx="1">
+            <a:schemeClr val="accent1"/>
+          </a:lnRef>
+          <a:fillRef idx="3">
+            <a:schemeClr val="accent1"/>
+          </a:fillRef>
+          <a:effectRef idx="2">
+            <a:schemeClr val="accent1"/>
+          </a:effectRef>
+          <a:fontRef idx="minor">
+            <a:schemeClr val="lt1"/>
+          </a:fontRef>
+        </p:style>
+        <p:txBody>
+          <a:bodyPr rtlCol="0" anchor="ctr"/>
+          <a:lstStyle/>
+          <a:p>
+            <a:pPr algn="ctr"/>
+          </a:p>
+        </p:txBody>
+      </p:sp>
+      <p:sp>
+        <p:nvSpPr>
+          <p:cNvPr id="5" name="TextBox 4"/>
+          <p:cNvSpPr txBox="1"/>
+          <p:nvPr/>
+        </p:nvSpPr>
+        <p:spPr>
+          <a:xfrm>
+            <a:off x="640080" y="1280160"/>
+            <a:ext cx="10515600" cy="5029200"/>
+          </a:xfrm>
+          <a:prstGeom prst="rect">
+            <a:avLst/>
+          </a:prstGeom>
+          <a:noFill/>
+        </p:spPr>
+        <p:txBody>
+          <a:bodyPr wrap="square">
+            <a:spAutoFit/>
+          </a:bodyPr>
+          <a:lstStyle/>
+          <a:p>
+            <a:pPr>
+              <a:spcAft>
+                <a:spcPts val="800"/>
+              </a:spcAft>
+              <a:defRPr sz="2000">
+                <a:solidFill>
+                  <a:srgbClr val="333333"/>
+                </a:solidFill>
+                <a:latin typeface="Calibri"/>
+              </a:defRPr>
+            </a:pPr>
+            <a:r>
+              <a:t>1. ¿Cuantas organizaciones y con peer propio?</a:t>
+            </a:r>
+          </a:p>
+          <a:p>
+            <a:pPr lvl="1">
+              <a:spcAft>
+                <a:spcPts val="400"/>
+              </a:spcAft>
+              <a:defRPr sz="1700">
+                <a:solidFill>
+                  <a:srgbClr val="666666"/>
+                </a:solidFill>
+                <a:latin typeface="Calibri"/>
+              </a:defRPr>
+            </a:pPr>
+            <a:r>
+              <a:t>    4 orgs (Productor, Distribuidor, Supermercado, Regulador), cada una con su peer.</a:t>
+            </a:r>
+          </a:p>
+          <a:p>
+            <a:pPr>
+              <a:spcAft>
+                <a:spcPts val="800"/>
+              </a:spcAft>
+              <a:defRPr sz="2000">
+                <a:solidFill>
+                  <a:srgbClr val="333333"/>
+                </a:solidFill>
+                <a:latin typeface="Calibri"/>
+              </a:defRPr>
+            </a:pPr>
+            <a:r>
+              <a:t>2. ¿Un canal unico o multiples canales segregados?</a:t>
+            </a:r>
+          </a:p>
+          <a:p>
+            <a:pPr lvl="1">
+              <a:spcAft>
+                <a:spcPts val="400"/>
+              </a:spcAft>
+              <a:defRPr sz="1700">
+                <a:solidFill>
+                  <a:srgbClr val="666666"/>
+                </a:solidFill>
+                <a:latin typeface="Calibri"/>
+              </a:defRPr>
+            </a:pPr>
+            <a:r>
+              <a:t>    Un canal unico compartido — la trazabilidad NECESITA ser publica entre miembros.</a:t>
+            </a:r>
+          </a:p>
+          <a:p>
+            <a:pPr>
+              <a:spcAft>
+                <a:spcPts val="800"/>
+              </a:spcAft>
+              <a:defRPr sz="2000">
+                <a:solidFill>
+                  <a:srgbClr val="333333"/>
+                </a:solidFill>
+                <a:latin typeface="Calibri"/>
+              </a:defRPr>
+            </a:pPr>
+            <a:r>
+              <a:t>3. ¿Datos on-chain vs Private Data?</a:t>
+            </a:r>
+          </a:p>
+          <a:p>
+            <a:pPr lvl="1">
+              <a:spcAft>
+                <a:spcPts val="400"/>
+              </a:spcAft>
+              <a:defRPr sz="1700">
+                <a:solidFill>
+                  <a:srgbClr val="666666"/>
+                </a:solidFill>
+                <a:latin typeface="Calibri"/>
+              </a:defRPr>
+            </a:pPr>
+            <a:r>
+              <a:t>    On-chain: lotID, origen, estado, movimientos (historial).</a:t>
+            </a:r>
+          </a:p>
+          <a:p>
+            <a:pPr lvl="1">
+              <a:spcAft>
+                <a:spcPts val="400"/>
+              </a:spcAft>
+              <a:defRPr sz="1700">
+                <a:solidFill>
+                  <a:srgbClr val="666666"/>
+                </a:solidFill>
+                <a:latin typeface="Calibri"/>
+              </a:defRPr>
+            </a:pPr>
+            <a:r>
+              <a:t>    Private Data: precios entre actores, margenes, terminos comerciales.</a:t>
+            </a:r>
+          </a:p>
+          <a:p>
+            <a:pPr>
+              <a:spcAft>
+                <a:spcPts val="800"/>
+              </a:spcAft>
+              <a:defRPr sz="2000">
+                <a:solidFill>
+                  <a:srgbClr val="333333"/>
+                </a:solidFill>
+                <a:latin typeface="Calibri"/>
+              </a:defRPr>
+            </a:pPr>
+            <a:r>
+              <a:t>4. ¿Quien puede crear un lote?</a:t>
+            </a:r>
+          </a:p>
+          <a:p>
+            <a:pPr lvl="1">
+              <a:spcAft>
+                <a:spcPts val="400"/>
+              </a:spcAft>
+              <a:defRPr sz="1700">
+                <a:solidFill>
+                  <a:srgbClr val="666666"/>
+                </a:solidFill>
+                <a:latin typeface="Calibri"/>
+              </a:defRPr>
+            </a:pPr>
+            <a:r>
+              <a:t>    Solo el Productor (validar MSPID == ProductorMSP en el chaincode).</a:t>
+            </a:r>
+          </a:p>
+          <a:p>
+            <a:pPr>
+              <a:spcAft>
+                <a:spcPts val="800"/>
+              </a:spcAft>
+              <a:defRPr sz="2000">
+                <a:solidFill>
+                  <a:srgbClr val="333333"/>
+                </a:solidFill>
+                <a:latin typeface="Calibri"/>
+              </a:defRPr>
+            </a:pPr>
+            <a:r>
+              <a:t>5. ¿Quien puede hacer recall?</a:t>
+            </a:r>
+          </a:p>
+          <a:p>
+            <a:pPr lvl="1">
+              <a:spcAft>
+                <a:spcPts val="400"/>
+              </a:spcAft>
+              <a:defRPr sz="1700">
+                <a:solidFill>
+                  <a:srgbClr val="666666"/>
+                </a:solidFill>
+                <a:latin typeface="Calibri"/>
+              </a:defRPr>
+            </a:pPr>
+            <a:r>
+              <a:t>    Solo el Regulador (via atributo role=regulador en cert X.509 — ABAC).</a:t>
+            </a:r>
+          </a:p>
+          <a:p>
+            <a:pPr>
+              <a:spcAft>
+                <a:spcPts val="800"/>
+              </a:spcAft>
+              <a:defRPr sz="2000">
+                <a:solidFill>
+                  <a:srgbClr val="333333"/>
+                </a:solidFill>
+                <a:latin typeface="Calibri"/>
+              </a:defRPr>
+            </a:pPr>
+            <a:r>
+              <a:t>6. Politica de endorsement (normal vs recall):</a:t>
+            </a:r>
+          </a:p>
+          <a:p>
+            <a:pPr lvl="1">
+              <a:spcAft>
+                <a:spcPts val="400"/>
+              </a:spcAft>
+              <a:defRPr sz="1700">
+                <a:solidFill>
+                  <a:srgbClr val="666666"/>
+                </a:solidFill>
+                <a:latin typeface="Calibri"/>
+              </a:defRPr>
+            </a:pPr>
+            <a:r>
+              <a:t>    Movimientos normales: solo el holder actual endorsa (state-based endorsement).</a:t>
+            </a:r>
+          </a:p>
+          <a:p>
+            <a:pPr lvl="1">
+              <a:spcAft>
+                <a:spcPts val="400"/>
+              </a:spcAft>
+              <a:defRPr sz="1700">
+                <a:solidFill>
+                  <a:srgbClr val="666666"/>
+                </a:solidFill>
+                <a:latin typeface="Calibri"/>
+              </a:defRPr>
+            </a:pPr>
+            <a:r>
+              <a:t>    Recall: AND(Productor, Distribuidor, Supermercado) para consenso amplio.</a:t>
+            </a:r>
+          </a:p>
+          <a:p>
+            <a:pPr>
+              <a:spcAft>
+                <a:spcPts val="800"/>
+              </a:spcAft>
+              <a:defRPr sz="2000">
+                <a:solidFill>
+                  <a:srgbClr val="333333"/>
+                </a:solidFill>
+                <a:latin typeface="Calibri"/>
+              </a:defRPr>
+            </a:pPr>
+            <a:r>
+              <a:t>7. ¿Como verifica el consumidor final un QR?</a:t>
+            </a:r>
+          </a:p>
+          <a:p>
+            <a:pPr lvl="1">
+              <a:spcAft>
+                <a:spcPts val="400"/>
+              </a:spcAft>
+              <a:defRPr sz="1700">
+                <a:solidFill>
+                  <a:srgbClr val="666666"/>
+                </a:solidFill>
+                <a:latin typeface="Calibri"/>
+              </a:defRPr>
+            </a:pPr>
+            <a:r>
+              <a:t>    Web publica del consorcio con QR -&gt; API REST -&gt; chaincode query.</a:t>
+            </a:r>
+          </a:p>
+          <a:p>
+            <a:pPr lvl="1">
+              <a:spcAft>
+                <a:spcPts val="400"/>
+              </a:spcAft>
+              <a:defRPr sz="1700">
+                <a:solidFill>
+                  <a:srgbClr val="666666"/>
+                </a:solidFill>
+                <a:latin typeface="Calibri"/>
+              </a:defRPr>
+            </a:pPr>
+            <a:r>
+              <a:t>    El consumidor no tiene peer ni certificado — es un lector publico.</a:t>
+            </a:r>
+          </a:p>
+        </p:txBody>
+      </p:sp>
+    </p:spTree>
+  </p:cSld>
+  <p:clrMapOvr>
+    <a:masterClrMapping/>
+  </p:clrMapOvr>
+</p:sld>
+</file>
+
+<file path=ppt/slides/slide11.xml><?xml version="1.0" encoding="utf-8"?>
+<p:sld xmlns:a="http://schemas.openxmlformats.org/drawingml/2006/main" xmlns:p="http://schemas.openxmlformats.org/presentationml/2006/main" xmlns:r="http://schemas.openxmlformats.org/officeDocument/2006/relationships">
+  <p:cSld>
+    <p:spTree>
+      <p:nvGrpSpPr>
+        <p:cNvPr id="1" name=""/>
+        <p:cNvGrpSpPr/>
+        <p:nvPr/>
+      </p:nvGrpSpPr>
+      <p:grpSpPr/>
+      <p:sp>
+        <p:nvSpPr>
+          <p:cNvPr id="2" name="Rectangle 1"/>
+          <p:cNvSpPr/>
+          <p:nvPr/>
+        </p:nvSpPr>
+        <p:spPr>
+          <a:xfrm>
+            <a:off x="0" y="0"/>
+            <a:ext cx="12188952" cy="73152"/>
+          </a:xfrm>
+          <a:prstGeom prst="rect">
+            <a:avLst/>
+          </a:prstGeom>
+          <a:solidFill>
+            <a:srgbClr val="22627E"/>
+          </a:solidFill>
+          <a:ln>
+            <a:noFill/>
+          </a:ln>
+        </p:spPr>
+        <p:style>
+          <a:lnRef idx="1">
+            <a:schemeClr val="accent1"/>
+          </a:lnRef>
+          <a:fillRef idx="3">
+            <a:schemeClr val="accent1"/>
+          </a:fillRef>
+          <a:effectRef idx="2">
+            <a:schemeClr val="accent1"/>
+          </a:effectRef>
+          <a:fontRef idx="minor">
+            <a:schemeClr val="lt1"/>
+          </a:fontRef>
+        </p:style>
+        <p:txBody>
+          <a:bodyPr rtlCol="0" anchor="ctr"/>
+          <a:lstStyle/>
+          <a:p>
+            <a:pPr algn="ctr"/>
+          </a:p>
+        </p:txBody>
+      </p:sp>
+      <p:sp>
+        <p:nvSpPr>
+          <p:cNvPr id="3" name="TextBox 2"/>
+          <p:cNvSpPr txBox="1"/>
+          <p:nvPr/>
+        </p:nvSpPr>
+        <p:spPr>
+          <a:xfrm>
+            <a:off x="457200" y="274320"/>
+            <a:ext cx="10972800" cy="731520"/>
+          </a:xfrm>
+          <a:prstGeom prst="rect">
+            <a:avLst/>
+          </a:prstGeom>
+          <a:noFill/>
+        </p:spPr>
+        <p:txBody>
+          <a:bodyPr wrap="square"/>
+          <a:lstStyle/>
+          <a:p>
+            <a:pPr algn="l">
+              <a:defRPr sz="3200" b="1">
+                <a:solidFill>
+                  <a:srgbClr val="22627E"/>
+                </a:solidFill>
+                <a:latin typeface="Calibri"/>
+              </a:defRPr>
+            </a:pPr>
+            <a:r>
+              <a:t>Respuestas al debate</a:t>
+            </a:r>
+          </a:p>
+        </p:txBody>
+      </p:sp>
+      <p:sp>
+        <p:nvSpPr>
+          <p:cNvPr id="4" name="Rectangle 3"/>
+          <p:cNvSpPr/>
+          <p:nvPr/>
+        </p:nvSpPr>
+        <p:spPr>
+          <a:xfrm>
+            <a:off x="457200" y="1051560"/>
+            <a:ext cx="10972800" cy="27432"/>
+          </a:xfrm>
+          <a:prstGeom prst="rect">
+            <a:avLst/>
+          </a:prstGeom>
+          <a:solidFill>
+            <a:srgbClr val="22627E"/>
+          </a:solidFill>
+          <a:ln>
+            <a:noFill/>
+          </a:ln>
+        </p:spPr>
+        <p:style>
+          <a:lnRef idx="1">
+            <a:schemeClr val="accent1"/>
+          </a:lnRef>
+          <a:fillRef idx="3">
+            <a:schemeClr val="accent1"/>
+          </a:fillRef>
+          <a:effectRef idx="2">
+            <a:schemeClr val="accent1"/>
+          </a:effectRef>
+          <a:fontRef idx="minor">
+            <a:schemeClr val="lt1"/>
+          </a:fontRef>
+        </p:style>
+        <p:txBody>
+          <a:bodyPr rtlCol="0" anchor="ctr"/>
+          <a:lstStyle/>
+          <a:p>
+            <a:pPr algn="ctr"/>
+          </a:p>
+        </p:txBody>
+      </p:sp>
+      <p:sp>
+        <p:nvSpPr>
+          <p:cNvPr id="5" name="TextBox 4"/>
+          <p:cNvSpPr txBox="1"/>
+          <p:nvPr/>
+        </p:nvSpPr>
+        <p:spPr>
+          <a:xfrm>
+            <a:off x="640080" y="1280160"/>
+            <a:ext cx="10515600" cy="5029200"/>
+          </a:xfrm>
+          <a:prstGeom prst="rect">
+            <a:avLst/>
+          </a:prstGeom>
+          <a:noFill/>
+        </p:spPr>
+        <p:txBody>
+          <a:bodyPr wrap="square">
+            <a:spAutoFit/>
+          </a:bodyPr>
+          <a:lstStyle/>
+          <a:p>
+            <a:pPr>
+              <a:spcAft>
+                <a:spcPts val="800"/>
+              </a:spcAft>
+              <a:defRPr sz="2000">
+                <a:solidFill>
+                  <a:srgbClr val="333333"/>
+                </a:solidFill>
+                <a:latin typeface="Calibri"/>
+              </a:defRPr>
+            </a:pPr>
+            <a:r>
+              <a:t>1. ¿Vuestra topologia vs IBM Food Trust?</a:t>
+            </a:r>
+          </a:p>
+          <a:p>
+            <a:pPr lvl="1">
+              <a:spcAft>
+                <a:spcPts val="400"/>
+              </a:spcAft>
+              <a:defRPr sz="1700">
+                <a:solidFill>
+                  <a:srgbClr val="666666"/>
+                </a:solidFill>
+                <a:latin typeface="Calibri"/>
+              </a:defRPr>
+            </a:pPr>
+            <a:r>
+              <a:t>    Food Trust tiene +150 orgs; nuestra red es reducida para aula.</a:t>
+            </a:r>
+          </a:p>
+          <a:p>
+            <a:pPr lvl="1">
+              <a:spcAft>
+                <a:spcPts val="400"/>
+              </a:spcAft>
+              <a:defRPr sz="1700">
+                <a:solidFill>
+                  <a:srgbClr val="666666"/>
+                </a:solidFill>
+                <a:latin typeface="Calibri"/>
+              </a:defRPr>
+            </a:pPr>
+            <a:r>
+              <a:t>    Diferencia clave: Food Trust no tiene regulador como org — Walmart es el fundador dominante.</a:t>
+            </a:r>
+          </a:p>
+          <a:p>
+            <a:pPr>
+              <a:spcAft>
+                <a:spcPts val="800"/>
+              </a:spcAft>
+              <a:defRPr sz="2000">
+                <a:solidFill>
+                  <a:srgbClr val="333333"/>
+                </a:solidFill>
+                <a:latin typeface="Calibri"/>
+              </a:defRPr>
+            </a:pPr>
+            <a:r>
+              <a:t>2. ¿Ventaja de Fabric vs una BD gestionada por Walmart?</a:t>
+            </a:r>
+          </a:p>
+          <a:p>
+            <a:pPr lvl="1">
+              <a:spcAft>
+                <a:spcPts val="400"/>
+              </a:spcAft>
+              <a:defRPr sz="1700">
+                <a:solidFill>
+                  <a:srgbClr val="666666"/>
+                </a:solidFill>
+                <a:latin typeface="Calibri"/>
+              </a:defRPr>
+            </a:pPr>
+            <a:r>
+              <a:t>    Walmart gestionando la BD: los competidores (Carrefour, Lidl) desconfian.</a:t>
+            </a:r>
+          </a:p>
+          <a:p>
+            <a:pPr lvl="1">
+              <a:spcAft>
+                <a:spcPts val="400"/>
+              </a:spcAft>
+              <a:defRPr sz="1700">
+                <a:solidFill>
+                  <a:srgbClr val="666666"/>
+                </a:solidFill>
+                <a:latin typeface="Calibri"/>
+              </a:defRPr>
+            </a:pPr>
+            <a:r>
+              <a:t>    Fabric: nadie controla solo; cada org valida independientemente.</a:t>
+            </a:r>
+          </a:p>
+          <a:p>
+            <a:pPr>
+              <a:spcAft>
+                <a:spcPts val="800"/>
+              </a:spcAft>
+              <a:defRPr sz="2000">
+                <a:solidFill>
+                  <a:srgbClr val="333333"/>
+                </a:solidFill>
+                <a:latin typeface="Calibri"/>
+              </a:defRPr>
+            </a:pPr>
+            <a:r>
+              <a:t>3. ¿Y si el productor miente sobre el origen?</a:t>
+            </a:r>
+          </a:p>
+          <a:p>
+            <a:pPr lvl="1">
+              <a:spcAft>
+                <a:spcPts val="400"/>
+              </a:spcAft>
+              <a:defRPr sz="1700">
+                <a:solidFill>
+                  <a:srgbClr val="666666"/>
+                </a:solidFill>
+                <a:latin typeface="Calibri"/>
+              </a:defRPr>
+            </a:pPr>
+            <a:r>
+              <a:t>    Blockchain garantiza INTEGRIDAD, no VERACIDAD.</a:t>
+            </a:r>
+          </a:p>
+          <a:p>
+            <a:pPr lvl="1">
+              <a:spcAft>
+                <a:spcPts val="400"/>
+              </a:spcAft>
+              <a:defRPr sz="1700">
+                <a:solidFill>
+                  <a:srgbClr val="666666"/>
+                </a:solidFill>
+                <a:latin typeface="Calibri"/>
+              </a:defRPr>
+            </a:pPr>
+            <a:r>
+              <a:t>    Si el productor miente al registrar, la mentira queda inmutable.</a:t>
+            </a:r>
+          </a:p>
+          <a:p>
+            <a:pPr lvl="1">
+              <a:spcAft>
+                <a:spcPts val="400"/>
+              </a:spcAft>
+              <a:defRPr sz="1700">
+                <a:solidFill>
+                  <a:srgbClr val="666666"/>
+                </a:solidFill>
+                <a:latin typeface="Calibri"/>
+              </a:defRPr>
+            </a:pPr>
+            <a:r>
+              <a:t>    Mitigar: auditorias fisicas, sensores IoT, validacion cruzada, responsabilidad legal.</a:t>
+            </a:r>
+          </a:p>
+          <a:p>
+            <a:pPr>
+              <a:spcAft>
+                <a:spcPts val="800"/>
+              </a:spcAft>
+              <a:defRPr sz="2000">
+                <a:solidFill>
+                  <a:srgbClr val="333333"/>
+                </a:solidFill>
+                <a:latin typeface="Calibri"/>
+              </a:defRPr>
+            </a:pPr>
+            <a:r>
+              <a:t>4. Walmart impuso la adopcion. ¿Justo? ¿Necesario?</a:t>
+            </a:r>
+          </a:p>
+          <a:p>
+            <a:pPr lvl="1">
+              <a:spcAft>
+                <a:spcPts val="400"/>
+              </a:spcAft>
+              <a:defRPr sz="1700">
+                <a:solidFill>
+                  <a:srgbClr val="666666"/>
+                </a:solidFill>
+                <a:latin typeface="Calibri"/>
+              </a:defRPr>
+            </a:pPr>
+            <a:r>
+              <a:t>    Funcional (es el lider), pero no ideal — genera problema del fundador dominante.</a:t>
+            </a:r>
+          </a:p>
+          <a:p>
+            <a:pPr lvl="1">
+              <a:spcAft>
+                <a:spcPts val="400"/>
+              </a:spcAft>
+              <a:defRPr sz="1700">
+                <a:solidFill>
+                  <a:srgbClr val="666666"/>
+                </a:solidFill>
+                <a:latin typeface="Calibri"/>
+              </a:defRPr>
+            </a:pPr>
+            <a:r>
+              <a:t>    Ideal: un regulador (AESAN, FDA) impulsa la adopcion; el mercado se suma.</a:t>
+            </a:r>
+          </a:p>
+          <a:p>
+            <a:pPr lvl="1">
+              <a:spcAft>
+                <a:spcPts val="400"/>
+              </a:spcAft>
+              <a:defRPr sz="1700">
+                <a:solidFill>
+                  <a:srgbClr val="666666"/>
+                </a:solidFill>
+                <a:latin typeface="Calibri"/>
+              </a:defRPr>
+            </a:pPr>
+            <a:r>
+              <a:t>    Aprender de TradeLens: sin los competidores no hay masa critica.</a:t>
+            </a:r>
+          </a:p>
+          <a:p>
+            <a:pPr>
+              <a:spcAft>
+                <a:spcPts val="800"/>
+              </a:spcAft>
+              <a:defRPr sz="2000">
+                <a:solidFill>
+                  <a:srgbClr val="333333"/>
+                </a:solidFill>
+                <a:latin typeface="Calibri"/>
+              </a:defRPr>
+            </a:pPr>
+            <a:r>
+              <a:t>5. Integrar sensores IoT para temperatura:</a:t>
+            </a:r>
+          </a:p>
+          <a:p>
+            <a:pPr lvl="1">
+              <a:spcAft>
+                <a:spcPts val="400"/>
+              </a:spcAft>
+              <a:defRPr sz="1700">
+                <a:solidFill>
+                  <a:srgbClr val="666666"/>
+                </a:solidFill>
+                <a:latin typeface="Calibri"/>
+              </a:defRPr>
+            </a:pPr>
+            <a:r>
+              <a:t>    Gateway IoT intermedio con certificado X.509.</a:t>
+            </a:r>
+          </a:p>
+          <a:p>
+            <a:pPr lvl="1">
+              <a:spcAft>
+                <a:spcPts val="400"/>
+              </a:spcAft>
+              <a:defRPr sz="1700">
+                <a:solidFill>
+                  <a:srgbClr val="666666"/>
+                </a:solidFill>
+                <a:latin typeface="Calibri"/>
+              </a:defRPr>
+            </a:pPr>
+            <a:r>
+              <a:t>    Los sensores firman con HMAC/TPM; el gateway valida y envia al chaincode.</a:t>
+            </a:r>
+          </a:p>
+          <a:p>
+            <a:pPr lvl="1">
+              <a:spcAft>
+                <a:spcPts val="400"/>
+              </a:spcAft>
+              <a:defRPr sz="1700">
+                <a:solidFill>
+                  <a:srgbClr val="666666"/>
+                </a:solidFill>
+                <a:latin typeface="Calibri"/>
+              </a:defRPr>
+            </a:pPr>
+            <a:r>
+              <a:t>    El chaincode ve: 'gateway-X certifica que sensor-Y reporto temp=X°C a las H'.</a:t>
             </a:r>
           </a:p>
         </p:txBody>
